--- a/output/education/2026-03-21_narrative-medicine-integrated/narrative-medicine_slides_allstaff.pptx
+++ b/output/education/2026-03-21_narrative-medicine-integrated/narrative-medicine_slides_allstaff.pptx
@@ -3133,6 +3133,7 @@
               </a:defRPr>
             </a:pPr>
             <a:r>
+              <a:rPr/>
               <a:t>患者さんの「物語」をケアに活かす</a:t>
             </a:r>
           </a:p>
@@ -3169,6 +3170,7 @@
               </a:defRPr>
             </a:pPr>
             <a:r>
+              <a:rPr/>
               <a:t>デジタル時代のナラティブ・ケア入門</a:t>
             </a:r>
           </a:p>
@@ -3213,7 +3215,9 @@
           <a:bodyPr rtlCol="0" anchor="ctr"/>
           <a:lstStyle/>
           <a:p>
-            <a:pPr algn="ctr"/>
+            <a:pPr algn="ctr">
+              <a:defRPr/>
+            </a:pPr>
           </a:p>
         </p:txBody>
       </p:sp>
@@ -3248,6 +3252,7 @@
               </a:defRPr>
             </a:pPr>
             <a:r>
+              <a:rPr/>
               <a:t>全スタッフ向け｜15分｜2026-03-21</a:t>
             </a:r>
           </a:p>
@@ -3288,7 +3293,7 @@
         <p:spPr>
           <a:xfrm>
             <a:off x="731520" y="274320"/>
-            <a:ext cx="7315200" cy="457200"/>
+            <a:ext cx="7315200" cy="518159"/>
           </a:xfrm>
           <a:prstGeom prst="rect">
             <a:avLst/>
@@ -3310,6 +3315,7 @@
               </a:defRPr>
             </a:pPr>
             <a:r>
+              <a:rPr/>
               <a:t>ある日の退院時に</a:t>
             </a:r>
           </a:p>
@@ -3356,7 +3362,9 @@
           <a:bodyPr rtlCol="0" anchor="ctr"/>
           <a:lstStyle/>
           <a:p>
-            <a:pPr algn="ctr"/>
+            <a:pPr algn="ctr">
+              <a:defRPr/>
+            </a:pPr>
           </a:p>
         </p:txBody>
       </p:sp>
@@ -3399,7 +3407,9 @@
           <a:bodyPr rtlCol="0" anchor="ctr"/>
           <a:lstStyle/>
           <a:p>
-            <a:pPr algn="ctr"/>
+            <a:pPr algn="ctr">
+              <a:defRPr/>
+            </a:pPr>
           </a:p>
         </p:txBody>
       </p:sp>
@@ -3434,22 +3444,27 @@
               </a:defRPr>
             </a:pPr>
             <a:r>
+              <a:rPr/>
               <a:t>「先生の治療も嬉しかったけど、</a:t>
             </a:r>
             <a:br/>
             <a:r>
+              <a:rPr/>
               <a:t> あの看護師さんが毎朝</a:t>
             </a:r>
             <a:br/>
             <a:r>
+              <a:rPr/>
               <a:t> "今日はどんな夢を見ましたか？"</a:t>
             </a:r>
             <a:br/>
             <a:r>
+              <a:rPr/>
               <a:t> って聞いてくれたのが</a:t>
             </a:r>
             <a:br/>
             <a:r>
+              <a:rPr/>
               <a:t> 一番の薬だったよ。」</a:t>
             </a:r>
           </a:p>
@@ -3464,7 +3479,7 @@
         <p:spPr>
           <a:xfrm>
             <a:off x="731520" y="3017520"/>
-            <a:ext cx="2743200" cy="274320"/>
+            <a:ext cx="2743200" cy="375920"/>
           </a:xfrm>
           <a:prstGeom prst="rect">
             <a:avLst/>
@@ -3486,6 +3501,7 @@
               </a:defRPr>
             </a:pPr>
             <a:r>
+              <a:rPr/>
               <a:t>今日のゴール</a:t>
             </a:r>
           </a:p>
@@ -3499,7 +3515,7 @@
         </p:nvSpPr>
         <p:spPr>
           <a:xfrm>
-            <a:off x="731520" y="3383280"/>
+            <a:off x="731520" y="3411727"/>
             <a:ext cx="7680960" cy="914400"/>
           </a:xfrm>
           <a:prstGeom prst="rect">
@@ -3523,6 +3539,7 @@
               <a:buChar char="●"/>
             </a:pPr>
             <a:r>
+              <a:rPr/>
               <a:t>「ナラティブ・ケア」の考え方がわかる</a:t>
             </a:r>
           </a:p>
@@ -3537,6 +3554,7 @@
               <a:buChar char="●"/>
             </a:pPr>
             <a:r>
+              <a:rPr/>
               <a:t>自分の業務で患者さんの物語を活かす方法を1つ挙げられる</a:t>
             </a:r>
           </a:p>
@@ -3577,7 +3595,7 @@
         <p:spPr>
           <a:xfrm>
             <a:off x="731520" y="274320"/>
-            <a:ext cx="7315200" cy="457200"/>
+            <a:ext cx="7315200" cy="589279"/>
           </a:xfrm>
           <a:prstGeom prst="rect">
             <a:avLst/>
@@ -3599,6 +3617,7 @@
               </a:defRPr>
             </a:pPr>
             <a:r>
+              <a:rPr/>
               <a:t>ナラティブ・ケアって何？</a:t>
             </a:r>
           </a:p>
@@ -3612,7 +3631,7 @@
         </p:nvSpPr>
         <p:spPr>
           <a:xfrm>
-            <a:off x="731520" y="731520"/>
+            <a:off x="731520" y="881887"/>
             <a:ext cx="7680960" cy="365760"/>
           </a:xfrm>
           <a:prstGeom prst="rect">
@@ -3635,6 +3654,7 @@
               </a:defRPr>
             </a:pPr>
             <a:r>
+              <a:rPr/>
               <a:t>ナラティブ = 物語。患者さんの物語に耳を傾け、ケアに活かすこと。</a:t>
             </a:r>
           </a:p>
@@ -3897,10 +3917,12 @@
               </a:defRPr>
             </a:pPr>
             <a:r>
+              <a:rPr/>
               <a:t>左が「何の病気か」。右が「どんな人生か」。</a:t>
             </a:r>
             <a:br/>
             <a:r>
+              <a:rPr/>
               <a:t>両方わかると、もっと良いケアができる。</a:t>
             </a:r>
           </a:p>
@@ -3941,7 +3963,7 @@
         <p:spPr>
           <a:xfrm>
             <a:off x="731520" y="274320"/>
-            <a:ext cx="7315200" cy="457200"/>
+            <a:ext cx="7315200" cy="518159"/>
           </a:xfrm>
           <a:prstGeom prst="rect">
             <a:avLst/>
@@ -3963,6 +3985,7 @@
               </a:defRPr>
             </a:pPr>
             <a:r>
+              <a:rPr/>
               <a:t>物語を聴くと、何が変わる？</a:t>
             </a:r>
           </a:p>
@@ -3976,8 +3999,8 @@
         </p:nvSpPr>
         <p:spPr>
           <a:xfrm>
-            <a:off x="731520" y="731520"/>
-            <a:ext cx="4572000" cy="274320"/>
+            <a:off x="731520" y="810767"/>
+            <a:ext cx="4572000" cy="304799"/>
           </a:xfrm>
           <a:prstGeom prst="rect">
             <a:avLst/>
@@ -3999,6 +4022,7 @@
               </a:defRPr>
             </a:pPr>
             <a:r>
+              <a:rPr/>
               <a:t>最新の研究でわかったこと</a:t>
             </a:r>
           </a:p>
@@ -4045,7 +4069,9 @@
           <a:bodyPr rtlCol="0" anchor="ctr"/>
           <a:lstStyle/>
           <a:p>
-            <a:pPr algn="ctr"/>
+            <a:pPr algn="ctr">
+              <a:defRPr/>
+            </a:pPr>
           </a:p>
         </p:txBody>
       </p:sp>
@@ -4088,7 +4114,9 @@
           <a:bodyPr rtlCol="0" anchor="ctr"/>
           <a:lstStyle/>
           <a:p>
-            <a:pPr algn="ctr"/>
+            <a:pPr algn="ctr">
+              <a:defRPr/>
+            </a:pPr>
           </a:p>
         </p:txBody>
       </p:sp>
@@ -4101,7 +4129,7 @@
         <p:spPr>
           <a:xfrm>
             <a:off x="868680" y="1143000"/>
-            <a:ext cx="7315200" cy="320040"/>
+            <a:ext cx="7315200" cy="340360"/>
           </a:xfrm>
           <a:prstGeom prst="rect">
             <a:avLst/>
@@ -4123,6 +4151,7 @@
               </a:defRPr>
             </a:pPr>
             <a:r>
+              <a:rPr/>
               <a:t>✨ 患者さんのストレスが軽減</a:t>
             </a:r>
           </a:p>
@@ -4136,7 +4165,7 @@
         </p:nvSpPr>
         <p:spPr>
           <a:xfrm>
-            <a:off x="868680" y="1463040"/>
+            <a:off x="868680" y="1501648"/>
             <a:ext cx="7315200" cy="320040"/>
           </a:xfrm>
           <a:prstGeom prst="rect">
@@ -4159,6 +4188,7 @@
               </a:defRPr>
             </a:pPr>
             <a:r>
+              <a:rPr/>
               <a:t>物語を聴いてもらえた患者は不安や孤立感が減る</a:t>
             </a:r>
           </a:p>
@@ -4205,7 +4235,9 @@
           <a:bodyPr rtlCol="0" anchor="ctr"/>
           <a:lstStyle/>
           <a:p>
-            <a:pPr algn="ctr"/>
+            <a:pPr algn="ctr">
+              <a:defRPr/>
+            </a:pPr>
           </a:p>
         </p:txBody>
       </p:sp>
@@ -4248,7 +4280,9 @@
           <a:bodyPr rtlCol="0" anchor="ctr"/>
           <a:lstStyle/>
           <a:p>
-            <a:pPr algn="ctr"/>
+            <a:pPr algn="ctr">
+              <a:defRPr/>
+            </a:pPr>
           </a:p>
         </p:txBody>
       </p:sp>
@@ -4261,7 +4295,7 @@
         <p:spPr>
           <a:xfrm>
             <a:off x="868680" y="2011679"/>
-            <a:ext cx="7315200" cy="320040"/>
+            <a:ext cx="7315200" cy="340360"/>
           </a:xfrm>
           <a:prstGeom prst="rect">
             <a:avLst/>
@@ -4283,6 +4317,7 @@
               </a:defRPr>
             </a:pPr>
             <a:r>
+              <a:rPr/>
               <a:t>✨ 医療者の判断の質が向上</a:t>
             </a:r>
           </a:p>
@@ -4296,7 +4331,7 @@
         </p:nvSpPr>
         <p:spPr>
           <a:xfrm>
-            <a:off x="868680" y="2331720"/>
+            <a:off x="868680" y="2370327"/>
             <a:ext cx="7315200" cy="320040"/>
           </a:xfrm>
           <a:prstGeom prst="rect">
@@ -4319,6 +4354,7 @@
               </a:defRPr>
             </a:pPr>
             <a:r>
+              <a:rPr/>
               <a:t>患者の背景を知ると、より適切な治療選択ができる</a:t>
             </a:r>
           </a:p>
@@ -4365,7 +4401,9 @@
           <a:bodyPr rtlCol="0" anchor="ctr"/>
           <a:lstStyle/>
           <a:p>
-            <a:pPr algn="ctr"/>
+            <a:pPr algn="ctr">
+              <a:defRPr/>
+            </a:pPr>
           </a:p>
         </p:txBody>
       </p:sp>
@@ -4408,7 +4446,9 @@
           <a:bodyPr rtlCol="0" anchor="ctr"/>
           <a:lstStyle/>
           <a:p>
-            <a:pPr algn="ctr"/>
+            <a:pPr algn="ctr">
+              <a:defRPr/>
+            </a:pPr>
           </a:p>
         </p:txBody>
       </p:sp>
@@ -4421,7 +4461,7 @@
         <p:spPr>
           <a:xfrm>
             <a:off x="868680" y="2880359"/>
-            <a:ext cx="7315200" cy="320040"/>
+            <a:ext cx="7315200" cy="340360"/>
           </a:xfrm>
           <a:prstGeom prst="rect">
             <a:avLst/>
@@ -4443,6 +4483,7 @@
               </a:defRPr>
             </a:pPr>
             <a:r>
+              <a:rPr/>
               <a:t>✨ チームケアが深まる</a:t>
             </a:r>
           </a:p>
@@ -4456,7 +4497,7 @@
         </p:nvSpPr>
         <p:spPr>
           <a:xfrm>
-            <a:off x="868680" y="3200399"/>
+            <a:off x="868680" y="3239007"/>
             <a:ext cx="7315200" cy="320040"/>
           </a:xfrm>
           <a:prstGeom prst="rect">
@@ -4479,6 +4520,7 @@
               </a:defRPr>
             </a:pPr>
             <a:r>
+              <a:rPr/>
               <a:t>物語の共有で多職種の連携が改善する</a:t>
             </a:r>
           </a:p>
@@ -4523,7 +4565,9 @@
           <a:bodyPr rtlCol="0" anchor="ctr"/>
           <a:lstStyle/>
           <a:p>
-            <a:pPr algn="ctr"/>
+            <a:pPr algn="ctr">
+              <a:defRPr/>
+            </a:pPr>
           </a:p>
         </p:txBody>
       </p:sp>
@@ -4558,6 +4602,7 @@
               </a:defRPr>
             </a:pPr>
             <a:r>
+              <a:rPr/>
               <a:t>ただの「優しさ」ではなく、ケアの質を上げるスキル</a:t>
             </a:r>
           </a:p>
@@ -4620,10 +4665,12 @@
               </a:defRPr>
             </a:pPr>
             <a:r>
+              <a:rPr/>
               <a:t>あなたの職種だからこそ</a:t>
             </a:r>
             <a:br/>
             <a:r>
+              <a:rPr/>
               <a:t>聴ける物語がある</a:t>
             </a:r>
           </a:p>
@@ -5057,6 +5104,7 @@
               </a:defRPr>
             </a:pPr>
             <a:r>
+              <a:rPr/>
               <a:t>どの職種も、患者さんにとって大切な「聴いてくれる人」になれます</a:t>
             </a:r>
           </a:p>
@@ -5097,7 +5145,7 @@
         <p:spPr>
           <a:xfrm>
             <a:off x="731520" y="274320"/>
-            <a:ext cx="7315200" cy="457200"/>
+            <a:ext cx="7315200" cy="589279"/>
           </a:xfrm>
           <a:prstGeom prst="rect">
             <a:avLst/>
@@ -5119,6 +5167,7 @@
               </a:defRPr>
             </a:pPr>
             <a:r>
+              <a:rPr/>
               <a:t>みんなで考えよう</a:t>
             </a:r>
           </a:p>
@@ -5132,8 +5181,8 @@
         </p:nvSpPr>
         <p:spPr>
           <a:xfrm>
-            <a:off x="731520" y="731520"/>
-            <a:ext cx="2743200" cy="320040"/>
+            <a:off x="731520" y="881887"/>
+            <a:ext cx="2743200" cy="340360"/>
           </a:xfrm>
           <a:prstGeom prst="rect">
             <a:avLst/>
@@ -5155,6 +5204,7 @@
               </a:defRPr>
             </a:pPr>
             <a:r>
+              <a:rPr/>
               <a:t>グループワーク｜3分間</a:t>
             </a:r>
           </a:p>
@@ -5199,7 +5249,9 @@
           <a:bodyPr rtlCol="0" anchor="ctr"/>
           <a:lstStyle/>
           <a:p>
-            <a:pPr algn="ctr"/>
+            <a:pPr algn="ctr">
+              <a:defRPr/>
+            </a:pPr>
           </a:p>
         </p:txBody>
       </p:sp>
@@ -5244,7 +5296,9 @@
           <a:bodyPr rtlCol="0" anchor="ctr"/>
           <a:lstStyle/>
           <a:p>
-            <a:pPr algn="ctr"/>
+            <a:pPr algn="ctr">
+              <a:defRPr/>
+            </a:pPr>
           </a:p>
         </p:txBody>
       </p:sp>
@@ -5279,18 +5333,22 @@
               </a:defRPr>
             </a:pPr>
             <a:r>
+              <a:rPr/>
               <a:t>最近、患者さんから聴いた</a:t>
             </a:r>
             <a:br/>
             <a:r>
+              <a:rPr/>
               <a:t>「心に残った一言」はありますか？</a:t>
             </a:r>
             <a:br/>
             <a:r>
+              <a:rPr/>
               <a:t>それをチームにどう共有したら、</a:t>
             </a:r>
             <a:br/>
             <a:r>
+              <a:rPr/>
               <a:t>ケアが良くなると思いますか？</a:t>
             </a:r>
           </a:p>
@@ -5305,7 +5363,7 @@
         <p:spPr>
           <a:xfrm>
             <a:off x="731520" y="2606040"/>
-            <a:ext cx="2743200" cy="274320"/>
+            <a:ext cx="2743200" cy="340360"/>
           </a:xfrm>
           <a:prstGeom prst="rect">
             <a:avLst/>
@@ -5327,6 +5385,7 @@
               </a:defRPr>
             </a:pPr>
             <a:r>
+              <a:rPr/>
               <a:t>話すヒント</a:t>
             </a:r>
           </a:p>
@@ -5340,7 +5399,7 @@
         </p:nvSpPr>
         <p:spPr>
           <a:xfrm>
-            <a:off x="731520" y="2926080"/>
+            <a:off x="731520" y="2964688"/>
             <a:ext cx="7680960" cy="1371600"/>
           </a:xfrm>
           <a:prstGeom prst="rect">
@@ -5364,6 +5423,7 @@
               <a:buChar char="●"/>
             </a:pPr>
             <a:r>
+              <a:rPr/>
               <a:t>大きなエピソードじゃなくてOK</a:t>
             </a:r>
           </a:p>
@@ -5378,6 +5438,7 @@
               <a:buChar char="●"/>
             </a:pPr>
             <a:r>
+              <a:rPr/>
               <a:t>「もっと聴きたかったけど時間がなかった」でもOK</a:t>
             </a:r>
           </a:p>
@@ -5392,6 +5453,7 @@
               <a:buChar char="●"/>
             </a:pPr>
             <a:r>
+              <a:rPr/>
               <a:t>守秘義務の範囲で（個人が特定されない形で）</a:t>
             </a:r>
           </a:p>
@@ -5432,7 +5494,7 @@
         <p:spPr>
           <a:xfrm>
             <a:off x="731520" y="274320"/>
-            <a:ext cx="7315200" cy="457200"/>
+            <a:ext cx="7315200" cy="518159"/>
           </a:xfrm>
           <a:prstGeom prst="rect">
             <a:avLst/>
@@ -5454,6 +5516,7 @@
               </a:defRPr>
             </a:pPr>
             <a:r>
+              <a:rPr/>
               <a:t>明日からできる「1日1聴」チャレンジ</a:t>
             </a:r>
           </a:p>
@@ -5774,7 +5837,9 @@
           <a:bodyPr rtlCol="0" anchor="ctr"/>
           <a:lstStyle/>
           <a:p>
-            <a:pPr algn="ctr"/>
+            <a:pPr algn="ctr">
+              <a:defRPr/>
+            </a:pPr>
           </a:p>
         </p:txBody>
       </p:sp>
@@ -5809,10 +5874,12 @@
               </a:defRPr>
             </a:pPr>
             <a:r>
+              <a:rPr/>
               <a:t>「聴く」ことは、特別なスキルではなく、</a:t>
             </a:r>
             <a:br/>
             <a:r>
+              <a:rPr/>
               <a:t>あなたがすでに毎日やっていることの延長線上にあります。</a:t>
             </a:r>
           </a:p>
@@ -5827,7 +5894,7 @@
         <p:spPr>
           <a:xfrm>
             <a:off x="731520" y="4114800"/>
-            <a:ext cx="3657600" cy="274320"/>
+            <a:ext cx="3657600" cy="287020"/>
           </a:xfrm>
           <a:prstGeom prst="rect">
             <a:avLst/>
@@ -5849,6 +5916,7 @@
               </a:defRPr>
             </a:pPr>
             <a:r>
+              <a:rPr/>
               <a:t>📎 参考文献リスト（別紙配布）</a:t>
             </a:r>
           </a:p>
